--- a/docs/V_Intelligence_UEBA_Traditional_vs_Behavioral_Deck.pptx
+++ b/docs/V_Intelligence_UEBA_Traditional_vs_Behavioral_Deck.pptx
@@ -3260,7 +3260,7 @@
               </a:defRPr>
             </a:pPr>
             <a:r>
-              <a:t>Empirical Analysis Across 130 Days of Cyber Telemetry</a:t>
+              <a:t>Empirical Analysis Across 485 Days of Cyber Telemetry</a:t>
             </a:r>
           </a:p>
         </p:txBody>
@@ -5768,7 +5768,7 @@
               </a:defRPr>
             </a:pPr>
             <a:r>
-              <a:t>No single method catches all 4 threats. The optimal ensemble combines two.</a:t>
+              <a:t>No single statistical method catches all 4 cleanly. The threat-profile detector does — at 0 FP.</a:t>
             </a:r>
           </a:p>
         </p:txBody>
@@ -6891,7 +6891,7 @@
               </a:defRPr>
             </a:pPr>
             <a:r>
-              <a:t>LOF + Zone Divergence:  ALL 4 DETECTED  |  6.5% FP</a:t>
+              <a:t>Threat-Profile Detector:  ALL 4 DETECTED  |  0% FP</a:t>
             </a:r>
           </a:p>
           <a:p>
@@ -6910,7 +6910,7 @@
               </a:defRPr>
             </a:pPr>
             <a:r>
-              <a:t>LOF catches nation-state footprints. Zone Divergence catches behavioral drift. Together: complete coverage at operational FP rates.</a:t>
+              <a:t>LOF catches nation-state footprints; Zone Divergence catches behavioral drift — but only the multi-front threat-profile detector covers all 4 cleanly at zero FP.</a:t>
             </a:r>
           </a:p>
         </p:txBody>
@@ -9208,7 +9208,7 @@
               </a:defRPr>
             </a:pPr>
             <a:r>
-              <a:t>LOF + Zone Divergence</a:t>
+              <a:t>Threat-Profile Detector</a:t>
             </a:r>
           </a:p>
         </p:txBody>
@@ -9244,7 +9244,7 @@
               </a:defRPr>
             </a:pPr>
             <a:r>
-              <a:t>Optimal 2-Method Ensemble</a:t>
+              <a:t>Multi-Front Known-Bad Profiles</a:t>
             </a:r>
           </a:p>
         </p:txBody>
@@ -9359,7 +9359,7 @@
               </a:defRPr>
             </a:pPr>
             <a:r>
-              <a:t>✓  6.5% False Positive Rate</a:t>
+              <a:t>✓  0% False Positive Rate</a:t>
             </a:r>
           </a:p>
         </p:txBody>
@@ -9395,15 +9395,15 @@
               </a:defRPr>
             </a:pPr>
             <a:r>
-              <a:t>Traditional catches network footprints.</a:t>
+              <a:t>Scores users against known-bad profiles</a:t>
             </a:r>
             <a:br/>
             <a:r>
-              <a:t>Behavioral catches direction changes.</a:t>
+              <a:t>(C2-beacon, DGA-DNS, LOTL, recon-fanout,</a:t>
             </a:r>
             <a:br/>
             <a:r>
-              <a:t>Together: 100% detection at 6.5% FP.</a:t>
+              <a:t>insider-collection). 100% detection, 0 FP.</a:t>
             </a:r>
           </a:p>
         </p:txBody>
@@ -9492,7 +9492,7 @@
               </a:defRPr>
             </a:pPr>
             <a:r>
-              <a:t>LOF + Zone Divergence: all 4 campaigns detected at 6.5% FP — optimal ensemble.</a:t>
+              <a:t>Threat-Profile Detector: all 4 campaigns detected at 0% FP — clean full coverage.</a:t>
             </a:r>
           </a:p>
         </p:txBody>
@@ -9998,7 +9998,7 @@
               </a:defRPr>
             </a:pPr>
             <a:r>
-              <a:t>Our empirical analysis across 130 days demonstrates that only semantic behavioral drift detection achieves both high detection rates and actionable false positive rates for slow, stealthy attacks.</a:t>
+              <a:t>Our empirical analysis across 485 days demonstrates that only semantic behavioral drift detection achieves both high detection rates and actionable false positive rates for slow, stealthy attacks.</a:t>
             </a:r>
           </a:p>
         </p:txBody>
@@ -15544,7 +15544,7 @@
               </a:defRPr>
             </a:pPr>
             <a:r>
-              <a:t>No single method detects all 4 attack campaigns — behavioral analysis required</a:t>
+              <a:t>No single statistical method detects all 4 cleanly — the threat-profile detector does (0 FP)</a:t>
             </a:r>
           </a:p>
         </p:txBody>
@@ -15741,7 +15741,7 @@
               </a:defRPr>
             </a:pPr>
             <a:r>
-              <a:t>130 Days</a:t>
+              <a:t>485 Days</a:t>
             </a:r>
           </a:p>
         </p:txBody>
@@ -15856,7 +15856,7 @@
               </a:defRPr>
             </a:pPr>
             <a:r>
-              <a:t>50 users across 7 log types</a:t>
+              <a:t>250 users across 7 log types</a:t>
             </a:r>
             <a:br/>
             <a:r>
@@ -15864,11 +15864,11 @@
             </a:r>
             <a:br/>
             <a:r>
-              <a:t>950 weekly feature vectors</a:t>
+              <a:t>17,500 weekly feature vectors</a:t>
             </a:r>
             <a:br/>
             <a:r>
-              <a:t>19 weeks of observation</a:t>
+              <a:t>70 weeks of observation</a:t>
             </a:r>
           </a:p>
         </p:txBody>
@@ -23360,21 +23360,21 @@
                     <a:lstStyle/>
                     <a:p>
                       <a:pPr algn="ctr">
-                        <a:defRPr sz="1300" b="1">
+                        <a:defRPr sz="1300" b="0">
                           <a:solidFill>
-                            <a:srgbClr val="FFFFFF"/>
+                            <a:srgbClr val="0D1B2A"/>
                           </a:solidFill>
                           <a:latin typeface="Calibri"/>
                         </a:defRPr>
                       </a:pPr>
                       <a:r>
-                        <a:t>DET</a:t>
+                        <a:t>BELOW</a:t>
                       </a:r>
                     </a:p>
                   </a:txBody>
                   <a:tcPr anchor="ctr">
                     <a:solidFill>
-                      <a:srgbClr val="27AE60"/>
+                      <a:srgbClr val="F0F2F5"/>
                     </a:solidFill>
                   </a:tcPr>
                 </a:tc>
@@ -23384,21 +23384,21 @@
                     <a:lstStyle/>
                     <a:p>
                       <a:pPr algn="ctr">
-                        <a:defRPr sz="1300" b="1">
+                        <a:defRPr sz="1300" b="0">
                           <a:solidFill>
-                            <a:srgbClr val="FFFFFF"/>
+                            <a:srgbClr val="0D1B2A"/>
                           </a:solidFill>
                           <a:latin typeface="Calibri"/>
                         </a:defRPr>
                       </a:pPr>
                       <a:r>
-                        <a:t>DET</a:t>
+                        <a:t>BELOW</a:t>
                       </a:r>
                     </a:p>
                   </a:txBody>
                   <a:tcPr anchor="ctr">
                     <a:solidFill>
-                      <a:srgbClr val="27AE60"/>
+                      <a:srgbClr val="F0F2F5"/>
                     </a:solidFill>
                   </a:tcPr>
                 </a:tc>
@@ -23440,7 +23440,7 @@
                         </a:defRPr>
                       </a:pPr>
                       <a:r>
-                        <a:t>8.7%</a:t>
+                        <a:t>2/4</a:t>
                       </a:r>
                     </a:p>
                   </a:txBody>
@@ -23466,7 +23466,7 @@
                         </a:defRPr>
                       </a:pPr>
                       <a:r>
-                        <a:t>LOF + Zone Div</a:t>
+                        <a:t>Threat-Profile Det</a:t>
                       </a:r>
                     </a:p>
                   </a:txBody>
@@ -23610,7 +23610,7 @@
                         </a:defRPr>
                       </a:pPr>
                       <a:r>
-                        <a:t>6.5%</a:t>
+                        <a:t>0.0%</a:t>
                       </a:r>
                     </a:p>
                   </a:txBody>
@@ -23675,7 +23675,7 @@
               </a:defRPr>
             </a:pPr>
             <a:r>
-              <a:t>LOF + Zone Divergence: ALL 4 attacks detected at 6.5% FP — the optimal 2-method ensemble across all 17 methods</a:t>
+              <a:t>Threat-Profile Detector: ALL 4 attacks detected at 0% FP — the only method with clean full coverage (composite separates just 2/4)</a:t>
             </a:r>
           </a:p>
         </p:txBody>
